--- a/Calengo Eloadas.pptx
+++ b/Calengo Eloadas.pptx
@@ -6829,7 +6829,7 @@
               </a:rPr>
               <a:t> </a:t>
             </a:r>
-            <a:endParaRPr lang="hu-HU" sz="1400">
+            <a:endParaRPr lang="hu-HU" sz="1400" dirty="0">
               <a:solidFill>
                 <a:schemeClr val="dk1"/>
               </a:solidFill>
@@ -6953,7 +6953,7 @@
               </a:rPr>
               <a:t> </a:t>
             </a:r>
-            <a:endParaRPr lang="en-US" sz="1400">
+            <a:endParaRPr lang="en-US" sz="1400" dirty="0">
               <a:solidFill>
                 <a:schemeClr val="dk1"/>
               </a:solidFill>
@@ -7024,7 +7024,7 @@
               </a:rPr>
               <a:t> </a:t>
             </a:r>
-            <a:endParaRPr lang="en-US" sz="1400">
+            <a:endParaRPr lang="en-US" sz="1400" dirty="0">
               <a:solidFill>
                 <a:schemeClr val="dk1"/>
               </a:solidFill>
@@ -7137,7 +7137,7 @@
               </a:rPr>
               <a:t> </a:t>
             </a:r>
-            <a:endParaRPr lang="en-US" sz="1400">
+            <a:endParaRPr lang="en-US" sz="1400" dirty="0">
               <a:solidFill>
                 <a:schemeClr val="dk1"/>
               </a:solidFill>
@@ -11826,6 +11826,15 @@
               </a:rPr>
               <a:t>: </a:t>
             </a:r>
+            <a:br>
+              <a:rPr lang="hu-HU" sz="1400" dirty="0">
+                <a:solidFill>
+                  <a:schemeClr val="dk1"/>
+                </a:solidFill>
+                <a:latin typeface="Arial"/>
+                <a:cs typeface="Arial"/>
+              </a:rPr>
+            </a:br>
             <a:r>
               <a:rPr lang="en-US" sz="1400" dirty="0" err="1">
                 <a:solidFill>
@@ -12402,13 +12411,16 @@
           <a:bodyPr/>
           <a:lstStyle/>
           <a:p>
-            <a:r>
-              <a:rPr lang="hu-HU" sz="2700" b="1">
+            <a:pPr marL="0" indent="0">
+              <a:buNone/>
+            </a:pPr>
+            <a:r>
+              <a:rPr lang="hu-HU" sz="2700" b="1" dirty="0">
                 <a:cs typeface="Arial"/>
               </a:rPr>
               <a:t>Edzői kezelőfelület és funkciói</a:t>
             </a:r>
-            <a:endParaRPr lang="hu-HU" sz="2700" b="1"/>
+            <a:endParaRPr lang="hu-HU" sz="2700" b="1" dirty="0"/>
           </a:p>
         </p:txBody>
       </p:sp>
@@ -12426,20 +12438,29 @@
           </p:cNvPicPr>
           <p:nvPr/>
         </p:nvPicPr>
-        <p:blipFill>
+        <p:blipFill rotWithShape="1">
           <a:blip r:embed="rId2"/>
-          <a:stretch>
-            <a:fillRect/>
-          </a:stretch>
+          <a:srcRect b="3059"/>
+          <a:stretch/>
         </p:blipFill>
         <p:spPr>
           <a:xfrm>
-            <a:off x="4656160" y="99769"/>
-            <a:ext cx="4316544" cy="2909891"/>
+            <a:off x="4653522" y="254542"/>
+            <a:ext cx="4190651" cy="2738581"/>
           </a:xfrm>
           <a:prstGeom prst="rect">
             <a:avLst/>
           </a:prstGeom>
+          <a:ln>
+            <a:noFill/>
+          </a:ln>
+          <a:effectLst>
+            <a:outerShdw blurRad="190500" algn="tl" rotWithShape="0">
+              <a:srgbClr val="000000">
+                <a:alpha val="70000"/>
+              </a:srgbClr>
+            </a:outerShdw>
+          </a:effectLst>
         </p:spPr>
       </p:pic>
       <p:pic>
@@ -12617,8 +12638,11 @@
           <a:bodyPr/>
           <a:lstStyle/>
           <a:p>
-            <a:r>
-              <a:rPr lang="hu-HU" sz="2700" b="1">
+            <a:pPr marL="0" indent="0">
+              <a:buNone/>
+            </a:pPr>
+            <a:r>
+              <a:rPr lang="hu-HU" sz="2700" b="1" dirty="0" err="1">
                 <a:cs typeface="Arial"/>
               </a:rPr>
               <a:t>User</a:t>
@@ -12630,12 +12654,12 @@
               <a:t> </a:t>
             </a:r>
             <a:r>
-              <a:rPr lang="hu-HU" sz="2700" b="1">
+              <a:rPr lang="hu-HU" sz="2700" b="1" dirty="0">
                 <a:cs typeface="Arial"/>
               </a:rPr>
               <a:t>kezelőfelület</a:t>
             </a:r>
-            <a:endParaRPr lang="hu-HU" sz="2700" b="1"/>
+            <a:endParaRPr lang="hu-HU" sz="2700" b="1" dirty="0"/>
           </a:p>
         </p:txBody>
       </p:sp>
